--- a/docs/토스페이먼츠_결제경로_파라엑스.pptx
+++ b/docs/토스페이먼츠_결제경로_파라엑스.pptx
@@ -13,6 +13,12 @@
     <p:sldId id="261" r:id="rId12"/>
     <p:sldId id="262" r:id="rId13"/>
     <p:sldId id="263" r:id="rId14"/>
+    <p:sldId id="264" r:id="rId15"/>
+    <p:sldId id="265" r:id="rId16"/>
+    <p:sldId id="266" r:id="rId17"/>
+    <p:sldId id="267" r:id="rId18"/>
+    <p:sldId id="268" r:id="rId19"/>
+    <p:sldId id="269" r:id="rId20"/>
   </p:sldIdLst>
   <p:sldSz cx="12191695" cy="6858000" type="screen4x3"/>
   <p:notesSz cx="6858000" cy="9144000"/>
@@ -3141,14 +3147,92 @@
       </p:sp>
       <p:sp>
         <p:nvSpPr>
-          <p:cNvPr id="3" name="Rectangle 2"/>
+          <p:cNvPr id="3" name="TextBox 2"/>
+          <p:cNvSpPr txBox="1"/>
+          <p:nvPr/>
+        </p:nvSpPr>
+        <p:spPr>
+          <a:xfrm>
+            <a:off x="822960" y="685800"/>
+            <a:ext cx="10515600" cy="548640"/>
+          </a:xfrm>
+          <a:prstGeom prst="rect">
+            <a:avLst/>
+          </a:prstGeom>
+          <a:noFill/>
+        </p:spPr>
+        <p:txBody>
+          <a:bodyPr wrap="square">
+            <a:spAutoFit/>
+          </a:bodyPr>
+          <a:lstStyle/>
+          <a:p>
+            <a:pPr algn="l">
+              <a:lnSpc>
+                <a:spcPct val="100000"/>
+              </a:lnSpc>
+            </a:pPr>
+            <a:r>
+              <a:rPr sz="3800" b="1">
+                <a:solidFill>
+                  <a:srgbClr val="1A1A1A"/>
+                </a:solidFill>
+                <a:latin typeface="맑은 고딕"/>
+              </a:rPr>
+              <a:t>결제경로 안내</a:t>
+            </a:r>
+          </a:p>
+        </p:txBody>
+      </p:sp>
+      <p:sp>
+        <p:nvSpPr>
+          <p:cNvPr id="4" name="TextBox 3"/>
+          <p:cNvSpPr txBox="1"/>
+          <p:nvPr/>
+        </p:nvSpPr>
+        <p:spPr>
+          <a:xfrm>
+            <a:off x="822960" y="1481328"/>
+            <a:ext cx="10515600" cy="365760"/>
+          </a:xfrm>
+          <a:prstGeom prst="rect">
+            <a:avLst/>
+          </a:prstGeom>
+          <a:noFill/>
+        </p:spPr>
+        <p:txBody>
+          <a:bodyPr wrap="square">
+            <a:spAutoFit/>
+          </a:bodyPr>
+          <a:lstStyle/>
+          <a:p>
+            <a:pPr algn="l">
+              <a:lnSpc>
+                <a:spcPct val="100000"/>
+              </a:lnSpc>
+            </a:pPr>
+            <a:r>
+              <a:rPr sz="1700" b="0">
+                <a:solidFill>
+                  <a:srgbClr val="666C78"/>
+                </a:solidFill>
+                <a:latin typeface="맑은 고딕"/>
+              </a:rPr>
+              <a:t>파라엑스 (Para-X) · MathLAB 기출분석</a:t>
+            </a:r>
+          </a:p>
+        </p:txBody>
+      </p:sp>
+      <p:sp>
+        <p:nvSpPr>
+          <p:cNvPr id="5" name="Rectangle 4"/>
           <p:cNvSpPr/>
           <p:nvPr/>
         </p:nvSpPr>
         <p:spPr>
           <a:xfrm>
-            <a:off x="0" y="2331720"/>
-            <a:ext cx="12191695" cy="54864"/>
+            <a:off x="822960" y="2057400"/>
+            <a:ext cx="10515600" cy="36576"/>
           </a:xfrm>
           <a:prstGeom prst="rect">
             <a:avLst/>
@@ -3185,14 +3269,14 @@
       </p:sp>
       <p:sp>
         <p:nvSpPr>
-          <p:cNvPr id="4" name="TextBox 3"/>
+          <p:cNvPr id="6" name="TextBox 5"/>
           <p:cNvSpPr txBox="1"/>
           <p:nvPr/>
         </p:nvSpPr>
         <p:spPr>
           <a:xfrm>
-            <a:off x="914400" y="1371600"/>
-            <a:ext cx="10332720" cy="548640"/>
+            <a:off x="1051560" y="2514600"/>
+            <a:ext cx="2103120" cy="384048"/>
           </a:xfrm>
           <a:prstGeom prst="rect">
             <a:avLst/>
@@ -3211,17 +3295,548 @@
               </a:lnSpc>
             </a:pPr>
             <a:r>
-              <a:rPr sz="4000" b="1">
+              <a:rPr sz="1600" b="1">
+                <a:solidFill>
+                  <a:srgbClr val="3182F6"/>
+                </a:solidFill>
+                <a:latin typeface="맑은 고딕"/>
+              </a:rPr>
+              <a:t>(1) 상호명</a:t>
+            </a:r>
+          </a:p>
+        </p:txBody>
+      </p:sp>
+      <p:sp>
+        <p:nvSpPr>
+          <p:cNvPr id="7" name="TextBox 6"/>
+          <p:cNvSpPr txBox="1"/>
+          <p:nvPr/>
+        </p:nvSpPr>
+        <p:spPr>
+          <a:xfrm>
+            <a:off x="3291840" y="2514600"/>
+            <a:ext cx="7772400" cy="384048"/>
+          </a:xfrm>
+          <a:prstGeom prst="rect">
+            <a:avLst/>
+          </a:prstGeom>
+          <a:noFill/>
+        </p:spPr>
+        <p:txBody>
+          <a:bodyPr wrap="square">
+            <a:spAutoFit/>
+          </a:bodyPr>
+          <a:lstStyle/>
+          <a:p>
+            <a:pPr algn="l">
+              <a:lnSpc>
+                <a:spcPct val="100000"/>
+              </a:lnSpc>
+            </a:pPr>
+            <a:r>
+              <a:rPr sz="1600" b="1">
                 <a:solidFill>
                   <a:srgbClr val="1A1A1A"/>
                 </a:solidFill>
                 <a:latin typeface="맑은 고딕"/>
               </a:rPr>
-              <a:t>결제경로 안내</a:t>
-            </a:r>
-          </a:p>
-        </p:txBody>
-      </p:sp>
+              <a:t>파라엑스</a:t>
+            </a:r>
+          </a:p>
+        </p:txBody>
+      </p:sp>
+      <p:sp>
+        <p:nvSpPr>
+          <p:cNvPr id="8" name="TextBox 7"/>
+          <p:cNvSpPr txBox="1"/>
+          <p:nvPr/>
+        </p:nvSpPr>
+        <p:spPr>
+          <a:xfrm>
+            <a:off x="1051560" y="3017520"/>
+            <a:ext cx="2103120" cy="384048"/>
+          </a:xfrm>
+          <a:prstGeom prst="rect">
+            <a:avLst/>
+          </a:prstGeom>
+          <a:noFill/>
+        </p:spPr>
+        <p:txBody>
+          <a:bodyPr wrap="square">
+            <a:spAutoFit/>
+          </a:bodyPr>
+          <a:lstStyle/>
+          <a:p>
+            <a:pPr algn="l">
+              <a:lnSpc>
+                <a:spcPct val="100000"/>
+              </a:lnSpc>
+            </a:pPr>
+            <a:r>
+              <a:rPr sz="1600" b="1">
+                <a:solidFill>
+                  <a:srgbClr val="3182F6"/>
+                </a:solidFill>
+                <a:latin typeface="맑은 고딕"/>
+              </a:rPr>
+              <a:t>(2) 사업자번호</a:t>
+            </a:r>
+          </a:p>
+        </p:txBody>
+      </p:sp>
+      <p:sp>
+        <p:nvSpPr>
+          <p:cNvPr id="9" name="TextBox 8"/>
+          <p:cNvSpPr txBox="1"/>
+          <p:nvPr/>
+        </p:nvSpPr>
+        <p:spPr>
+          <a:xfrm>
+            <a:off x="3291840" y="3017520"/>
+            <a:ext cx="7772400" cy="384048"/>
+          </a:xfrm>
+          <a:prstGeom prst="rect">
+            <a:avLst/>
+          </a:prstGeom>
+          <a:noFill/>
+        </p:spPr>
+        <p:txBody>
+          <a:bodyPr wrap="square">
+            <a:spAutoFit/>
+          </a:bodyPr>
+          <a:lstStyle/>
+          <a:p>
+            <a:pPr algn="l">
+              <a:lnSpc>
+                <a:spcPct val="100000"/>
+              </a:lnSpc>
+            </a:pPr>
+            <a:r>
+              <a:rPr sz="1600" b="1">
+                <a:solidFill>
+                  <a:srgbClr val="1A1A1A"/>
+                </a:solidFill>
+                <a:latin typeface="맑은 고딕"/>
+              </a:rPr>
+              <a:t>496-25-02217</a:t>
+            </a:r>
+          </a:p>
+        </p:txBody>
+      </p:sp>
+      <p:sp>
+        <p:nvSpPr>
+          <p:cNvPr id="10" name="TextBox 9"/>
+          <p:cNvSpPr txBox="1"/>
+          <p:nvPr/>
+        </p:nvSpPr>
+        <p:spPr>
+          <a:xfrm>
+            <a:off x="1051560" y="3520440"/>
+            <a:ext cx="2103120" cy="384048"/>
+          </a:xfrm>
+          <a:prstGeom prst="rect">
+            <a:avLst/>
+          </a:prstGeom>
+          <a:noFill/>
+        </p:spPr>
+        <p:txBody>
+          <a:bodyPr wrap="square">
+            <a:spAutoFit/>
+          </a:bodyPr>
+          <a:lstStyle/>
+          <a:p>
+            <a:pPr algn="l">
+              <a:lnSpc>
+                <a:spcPct val="100000"/>
+              </a:lnSpc>
+            </a:pPr>
+            <a:r>
+              <a:rPr sz="1600" b="1">
+                <a:solidFill>
+                  <a:srgbClr val="3182F6"/>
+                </a:solidFill>
+                <a:latin typeface="맑은 고딕"/>
+              </a:rPr>
+              <a:t>(3) URL</a:t>
+            </a:r>
+          </a:p>
+        </p:txBody>
+      </p:sp>
+      <p:sp>
+        <p:nvSpPr>
+          <p:cNvPr id="11" name="TextBox 10"/>
+          <p:cNvSpPr txBox="1"/>
+          <p:nvPr/>
+        </p:nvSpPr>
+        <p:spPr>
+          <a:xfrm>
+            <a:off x="3291840" y="3520440"/>
+            <a:ext cx="7772400" cy="384048"/>
+          </a:xfrm>
+          <a:prstGeom prst="rect">
+            <a:avLst/>
+          </a:prstGeom>
+          <a:noFill/>
+        </p:spPr>
+        <p:txBody>
+          <a:bodyPr wrap="square">
+            <a:spAutoFit/>
+          </a:bodyPr>
+          <a:lstStyle/>
+          <a:p>
+            <a:pPr algn="l">
+              <a:lnSpc>
+                <a:spcPct val="100000"/>
+              </a:lnSpc>
+            </a:pPr>
+            <a:r>
+              <a:rPr sz="1600" b="1">
+                <a:solidFill>
+                  <a:srgbClr val="1A1A1A"/>
+                </a:solidFill>
+                <a:latin typeface="맑은 고딕"/>
+              </a:rPr>
+              <a:t>https://mathlab.para-x.co.kr</a:t>
+            </a:r>
+          </a:p>
+        </p:txBody>
+      </p:sp>
+      <p:sp>
+        <p:nvSpPr>
+          <p:cNvPr id="12" name="TextBox 11"/>
+          <p:cNvSpPr txBox="1"/>
+          <p:nvPr/>
+        </p:nvSpPr>
+        <p:spPr>
+          <a:xfrm>
+            <a:off x="1051560" y="4023360"/>
+            <a:ext cx="2103120" cy="384048"/>
+          </a:xfrm>
+          <a:prstGeom prst="rect">
+            <a:avLst/>
+          </a:prstGeom>
+          <a:noFill/>
+        </p:spPr>
+        <p:txBody>
+          <a:bodyPr wrap="square">
+            <a:spAutoFit/>
+          </a:bodyPr>
+          <a:lstStyle/>
+          <a:p>
+            <a:pPr algn="l">
+              <a:lnSpc>
+                <a:spcPct val="100000"/>
+              </a:lnSpc>
+            </a:pPr>
+            <a:r>
+              <a:rPr sz="1600" b="1">
+                <a:solidFill>
+                  <a:srgbClr val="3182F6"/>
+                </a:solidFill>
+                <a:latin typeface="맑은 고딕"/>
+              </a:rPr>
+              <a:t>(4) Test ID</a:t>
+            </a:r>
+          </a:p>
+        </p:txBody>
+      </p:sp>
+      <p:sp>
+        <p:nvSpPr>
+          <p:cNvPr id="13" name="TextBox 12"/>
+          <p:cNvSpPr txBox="1"/>
+          <p:nvPr/>
+        </p:nvSpPr>
+        <p:spPr>
+          <a:xfrm>
+            <a:off x="3291840" y="4023360"/>
+            <a:ext cx="7772400" cy="384048"/>
+          </a:xfrm>
+          <a:prstGeom prst="rect">
+            <a:avLst/>
+          </a:prstGeom>
+          <a:noFill/>
+        </p:spPr>
+        <p:txBody>
+          <a:bodyPr wrap="square">
+            <a:spAutoFit/>
+          </a:bodyPr>
+          <a:lstStyle/>
+          <a:p>
+            <a:pPr algn="l">
+              <a:lnSpc>
+                <a:spcPct val="100000"/>
+              </a:lnSpc>
+            </a:pPr>
+            <a:r>
+              <a:rPr sz="1600" b="1">
+                <a:solidFill>
+                  <a:srgbClr val="1A1A1A"/>
+                </a:solidFill>
+                <a:latin typeface="맑은 고딕"/>
+              </a:rPr>
+              <a:t>paraxreview</a:t>
+            </a:r>
+          </a:p>
+        </p:txBody>
+      </p:sp>
+      <p:sp>
+        <p:nvSpPr>
+          <p:cNvPr id="14" name="TextBox 13"/>
+          <p:cNvSpPr txBox="1"/>
+          <p:nvPr/>
+        </p:nvSpPr>
+        <p:spPr>
+          <a:xfrm>
+            <a:off x="1051560" y="4526280"/>
+            <a:ext cx="2103120" cy="384048"/>
+          </a:xfrm>
+          <a:prstGeom prst="rect">
+            <a:avLst/>
+          </a:prstGeom>
+          <a:noFill/>
+        </p:spPr>
+        <p:txBody>
+          <a:bodyPr wrap="square">
+            <a:spAutoFit/>
+          </a:bodyPr>
+          <a:lstStyle/>
+          <a:p>
+            <a:pPr algn="l">
+              <a:lnSpc>
+                <a:spcPct val="100000"/>
+              </a:lnSpc>
+            </a:pPr>
+            <a:r>
+              <a:rPr sz="1600" b="1">
+                <a:solidFill>
+                  <a:srgbClr val="3182F6"/>
+                </a:solidFill>
+                <a:latin typeface="맑은 고딕"/>
+              </a:rPr>
+              <a:t>(5) Test PW</a:t>
+            </a:r>
+          </a:p>
+        </p:txBody>
+      </p:sp>
+      <p:sp>
+        <p:nvSpPr>
+          <p:cNvPr id="15" name="TextBox 14"/>
+          <p:cNvSpPr txBox="1"/>
+          <p:nvPr/>
+        </p:nvSpPr>
+        <p:spPr>
+          <a:xfrm>
+            <a:off x="3291840" y="4526280"/>
+            <a:ext cx="7772400" cy="384048"/>
+          </a:xfrm>
+          <a:prstGeom prst="rect">
+            <a:avLst/>
+          </a:prstGeom>
+          <a:noFill/>
+        </p:spPr>
+        <p:txBody>
+          <a:bodyPr wrap="square">
+            <a:spAutoFit/>
+          </a:bodyPr>
+          <a:lstStyle/>
+          <a:p>
+            <a:pPr algn="l">
+              <a:lnSpc>
+                <a:spcPct val="100000"/>
+              </a:lnSpc>
+            </a:pPr>
+            <a:r>
+              <a:rPr sz="1600" b="1">
+                <a:solidFill>
+                  <a:srgbClr val="1A1A1A"/>
+                </a:solidFill>
+                <a:latin typeface="맑은 고딕"/>
+              </a:rPr>
+              <a:t>Parax2026!</a:t>
+            </a:r>
+          </a:p>
+        </p:txBody>
+      </p:sp>
+      <p:sp>
+        <p:nvSpPr>
+          <p:cNvPr id="16" name="TextBox 15"/>
+          <p:cNvSpPr txBox="1"/>
+          <p:nvPr/>
+        </p:nvSpPr>
+        <p:spPr>
+          <a:xfrm>
+            <a:off x="1051560" y="5623560"/>
+            <a:ext cx="10058400" cy="822960"/>
+          </a:xfrm>
+          <a:prstGeom prst="rect">
+            <a:avLst/>
+          </a:prstGeom>
+          <a:noFill/>
+        </p:spPr>
+        <p:txBody>
+          <a:bodyPr wrap="square">
+            <a:spAutoFit/>
+          </a:bodyPr>
+          <a:lstStyle/>
+          <a:p>
+            <a:pPr algn="l">
+              <a:lnSpc>
+                <a:spcPct val="150000"/>
+              </a:lnSpc>
+            </a:pPr>
+            <a:r>
+              <a:rPr sz="1150" b="0">
+                <a:solidFill>
+                  <a:srgbClr val="666C78"/>
+                </a:solidFill>
+                <a:latin typeface="맑은 고딕"/>
+              </a:rPr>
+              <a:t>· 서비스 유형: 무형(디지털) 재화 — 배송 없음 / 서비스 제공기간: 일회성 이용권 충전일로부터 1년, 구독 1개월 단위</a:t>
+            </a:r>
+          </a:p>
+          <a:p>
+            <a:pPr algn="l">
+              <a:lnSpc>
+                <a:spcPct val="150000"/>
+              </a:lnSpc>
+            </a:pPr>
+            <a:r>
+              <a:rPr sz="1150" b="0">
+                <a:solidFill>
+                  <a:srgbClr val="666C78"/>
+                </a:solidFill>
+                <a:latin typeface="맑은 고딕"/>
+              </a:rPr>
+              <a:t>· 결제 유형: 충전업종(일회성 이용권) + 정기결제(월 구독) / 토스페이먼츠 결제위젯 직접 연동(호스팅사 미사용)</a:t>
+            </a:r>
+          </a:p>
+        </p:txBody>
+      </p:sp>
+    </p:spTree>
+  </p:cSld>
+  <p:clrMapOvr>
+    <a:masterClrMapping/>
+  </p:clrMapOvr>
+</p:sld>
+</file>
+
+<file path=ppt/slides/slide10.xml><?xml version="1.0" encoding="utf-8"?>
+<p:sld xmlns:a="http://schemas.openxmlformats.org/drawingml/2006/main" xmlns:p="http://schemas.openxmlformats.org/presentationml/2006/main" xmlns:r="http://schemas.openxmlformats.org/officeDocument/2006/relationships">
+  <p:cSld>
+    <p:spTree>
+      <p:nvGrpSpPr>
+        <p:cNvPr id="1" name=""/>
+        <p:cNvGrpSpPr/>
+        <p:nvPr/>
+      </p:nvGrpSpPr>
+      <p:grpSpPr/>
+      <p:sp>
+        <p:nvSpPr>
+          <p:cNvPr id="2" name="TextBox 1"/>
+          <p:cNvSpPr txBox="1"/>
+          <p:nvPr/>
+        </p:nvSpPr>
+        <p:spPr>
+          <a:xfrm>
+            <a:off x="502920" y="292608"/>
+            <a:ext cx="3657600" cy="320040"/>
+          </a:xfrm>
+          <a:prstGeom prst="rect">
+            <a:avLst/>
+          </a:prstGeom>
+          <a:noFill/>
+        </p:spPr>
+        <p:txBody>
+          <a:bodyPr wrap="square">
+            <a:spAutoFit/>
+          </a:bodyPr>
+          <a:lstStyle/>
+          <a:p>
+            <a:pPr algn="l">
+              <a:lnSpc>
+                <a:spcPct val="100000"/>
+              </a:lnSpc>
+            </a:pPr>
+            <a:r>
+              <a:rPr sz="1300" b="1">
+                <a:solidFill>
+                  <a:srgbClr val="3182F6"/>
+                </a:solidFill>
+                <a:latin typeface="맑은 고딕"/>
+              </a:rPr>
+              <a:t>⑦-2 카드 결제경로</a:t>
+            </a:r>
+          </a:p>
+        </p:txBody>
+      </p:sp>
+      <p:sp>
+        <p:nvSpPr>
+          <p:cNvPr id="3" name="TextBox 2"/>
+          <p:cNvSpPr txBox="1"/>
+          <p:nvPr/>
+        </p:nvSpPr>
+        <p:spPr>
+          <a:xfrm>
+            <a:off x="502920" y="566928"/>
+            <a:ext cx="11155680" cy="457200"/>
+          </a:xfrm>
+          <a:prstGeom prst="rect">
+            <a:avLst/>
+          </a:prstGeom>
+          <a:noFill/>
+        </p:spPr>
+        <p:txBody>
+          <a:bodyPr wrap="square">
+            <a:spAutoFit/>
+          </a:bodyPr>
+          <a:lstStyle/>
+          <a:p>
+            <a:pPr algn="l">
+              <a:lnSpc>
+                <a:spcPct val="100000"/>
+              </a:lnSpc>
+            </a:pPr>
+            <a:r>
+              <a:rPr sz="2500" b="1">
+                <a:solidFill>
+                  <a:srgbClr val="1A1A1A"/>
+                </a:solidFill>
+                <a:latin typeface="맑은 고딕"/>
+              </a:rPr>
+              <a:t>카드사 인증창 — 농협카드</a:t>
+            </a:r>
+          </a:p>
+        </p:txBody>
+      </p:sp>
+      <p:pic>
+        <p:nvPicPr>
+          <p:cNvPr id="4" name="Picture 3" descr="s07b-card-nh.png"/>
+          <p:cNvPicPr>
+            <a:picLocks noChangeAspect="1"/>
+          </p:cNvPicPr>
+          <p:nvPr/>
+        </p:nvPicPr>
+        <p:blipFill>
+          <a:blip r:embed="rId2"/>
+          <a:stretch>
+            <a:fillRect/>
+          </a:stretch>
+        </p:blipFill>
+        <p:spPr>
+          <a:xfrm>
+            <a:off x="502920" y="1325880"/>
+            <a:ext cx="3141432" cy="5029200"/>
+          </a:xfrm>
+          <a:prstGeom prst="rect">
+            <a:avLst/>
+          </a:prstGeom>
+          <a:ln w="9525">
+            <a:solidFill>
+              <a:srgbClr val="DDE1E6"/>
+            </a:solidFill>
+          </a:ln>
+        </p:spPr>
+      </p:pic>
       <p:sp>
         <p:nvSpPr>
           <p:cNvPr id="5" name="TextBox 4"/>
@@ -3230,8 +3845,8 @@
         </p:nvSpPr>
         <p:spPr>
           <a:xfrm>
-            <a:off x="914400" y="2514600"/>
-            <a:ext cx="10332720" cy="457200"/>
+            <a:off x="8092440" y="1371600"/>
+            <a:ext cx="3611880" cy="4572000"/>
           </a:xfrm>
           <a:prstGeom prst="rect">
             <a:avLst/>
@@ -3246,31 +3861,81 @@
           <a:p>
             <a:pPr algn="l">
               <a:lnSpc>
-                <a:spcPct val="100000"/>
-              </a:lnSpc>
-            </a:pPr>
-            <a:r>
-              <a:rPr sz="2000" b="0">
-                <a:solidFill>
-                  <a:srgbClr val="666C78"/>
-                </a:solidFill>
-                <a:latin typeface="맑은 고딕"/>
-              </a:rPr>
-              <a:t>파라엑스 (Para-X) · MathLAB 기출분석</a:t>
-            </a:r>
-          </a:p>
-        </p:txBody>
-      </p:sp>
-      <p:sp>
-        <p:nvSpPr>
-          <p:cNvPr id="6" name="TextBox 5"/>
+                <a:spcPct val="160000"/>
+              </a:lnSpc>
+            </a:pPr>
+            <a:r>
+              <a:rPr sz="1250" b="0">
+                <a:solidFill>
+                  <a:srgbClr val="1A1A1A"/>
+                </a:solidFill>
+                <a:latin typeface="맑은 고딕"/>
+              </a:rPr>
+              <a:t>• [신용·체크카드] → 카드사 [농협] 선택 → [결제하기]</a:t>
+            </a:r>
+          </a:p>
+          <a:p>
+            <a:pPr algn="l">
+              <a:lnSpc>
+                <a:spcPct val="160000"/>
+              </a:lnSpc>
+            </a:pPr>
+            <a:r>
+              <a:rPr sz="1250" b="0">
+                <a:solidFill>
+                  <a:srgbClr val="1A1A1A"/>
+                </a:solidFill>
+                <a:latin typeface="맑은 고딕"/>
+              </a:rPr>
+              <a:t>• 농협카드 인증창이 호출됩니다(NH Pay 앱카드 / 일반결제 선택).</a:t>
+            </a:r>
+          </a:p>
+          <a:p>
+            <a:pPr algn="l">
+              <a:lnSpc>
+                <a:spcPct val="160000"/>
+              </a:lnSpc>
+            </a:pPr>
+            <a:r>
+              <a:rPr sz="1250" b="0">
+                <a:solidFill>
+                  <a:srgbClr val="1A1A1A"/>
+                </a:solidFill>
+                <a:latin typeface="맑은 고딕"/>
+              </a:rPr>
+              <a:t>• 가이드 요건에 따라 2개 카드사의 인증 화면을 모두 첨부했습니다.</a:t>
+            </a:r>
+          </a:p>
+        </p:txBody>
+      </p:sp>
+    </p:spTree>
+  </p:cSld>
+  <p:clrMapOvr>
+    <a:masterClrMapping/>
+  </p:clrMapOvr>
+</p:sld>
+</file>
+
+<file path=ppt/slides/slide11.xml><?xml version="1.0" encoding="utf-8"?>
+<p:sld xmlns:a="http://schemas.openxmlformats.org/drawingml/2006/main" xmlns:p="http://schemas.openxmlformats.org/presentationml/2006/main" xmlns:r="http://schemas.openxmlformats.org/officeDocument/2006/relationships">
+  <p:cSld>
+    <p:spTree>
+      <p:nvGrpSpPr>
+        <p:cNvPr id="1" name=""/>
+        <p:cNvGrpSpPr/>
+        <p:nvPr/>
+      </p:nvGrpSpPr>
+      <p:grpSpPr/>
+      <p:sp>
+        <p:nvSpPr>
+          <p:cNvPr id="2" name="TextBox 1"/>
           <p:cNvSpPr txBox="1"/>
           <p:nvPr/>
         </p:nvSpPr>
         <p:spPr>
           <a:xfrm>
-            <a:off x="914400" y="3291840"/>
-            <a:ext cx="10332720" cy="2011680"/>
+            <a:off x="502920" y="292608"/>
+            <a:ext cx="3657600" cy="320040"/>
           </a:xfrm>
           <a:prstGeom prst="rect">
             <a:avLst/>
@@ -3285,81 +3950,760 @@
           <a:p>
             <a:pPr algn="l">
               <a:lnSpc>
-                <a:spcPct val="190000"/>
-              </a:lnSpc>
-            </a:pPr>
-            <a:r>
-              <a:rPr sz="1500" b="0">
+                <a:spcPct val="100000"/>
+              </a:lnSpc>
+            </a:pPr>
+            <a:r>
+              <a:rPr sz="1300" b="1">
+                <a:solidFill>
+                  <a:srgbClr val="3182F6"/>
+                </a:solidFill>
+                <a:latin typeface="맑은 고딕"/>
+              </a:rPr>
+              <a:t>⑦-3 카드 결제경로</a:t>
+            </a:r>
+          </a:p>
+        </p:txBody>
+      </p:sp>
+      <p:sp>
+        <p:nvSpPr>
+          <p:cNvPr id="3" name="TextBox 2"/>
+          <p:cNvSpPr txBox="1"/>
+          <p:nvPr/>
+        </p:nvSpPr>
+        <p:spPr>
+          <a:xfrm>
+            <a:off x="502920" y="566928"/>
+            <a:ext cx="11155680" cy="457200"/>
+          </a:xfrm>
+          <a:prstGeom prst="rect">
+            <a:avLst/>
+          </a:prstGeom>
+          <a:noFill/>
+        </p:spPr>
+        <p:txBody>
+          <a:bodyPr wrap="square">
+            <a:spAutoFit/>
+          </a:bodyPr>
+          <a:lstStyle/>
+          <a:p>
+            <a:pPr algn="l">
+              <a:lnSpc>
+                <a:spcPct val="100000"/>
+              </a:lnSpc>
+            </a:pPr>
+            <a:r>
+              <a:rPr sz="2500" b="1">
                 <a:solidFill>
                   <a:srgbClr val="1A1A1A"/>
                 </a:solidFill>
                 <a:latin typeface="맑은 고딕"/>
               </a:rPr>
-              <a:t>서비스 유형   무형(디지털) 재화 — 배송 없음</a:t>
-            </a:r>
-          </a:p>
-          <a:p>
-            <a:pPr algn="l">
-              <a:lnSpc>
-                <a:spcPct val="190000"/>
-              </a:lnSpc>
-            </a:pPr>
-            <a:r>
-              <a:rPr sz="1500" b="0">
+              <a:t>카드사 인증창 — 국민카드 (참고)</a:t>
+            </a:r>
+          </a:p>
+        </p:txBody>
+      </p:sp>
+      <p:pic>
+        <p:nvPicPr>
+          <p:cNvPr id="4" name="Picture 3" descr="05-paywindow.png"/>
+          <p:cNvPicPr>
+            <a:picLocks noChangeAspect="1"/>
+          </p:cNvPicPr>
+          <p:nvPr/>
+        </p:nvPicPr>
+        <p:blipFill>
+          <a:blip r:embed="rId2"/>
+          <a:stretch>
+            <a:fillRect/>
+          </a:stretch>
+        </p:blipFill>
+        <p:spPr>
+          <a:xfrm>
+            <a:off x="502920" y="1325880"/>
+            <a:ext cx="3141432" cy="5029200"/>
+          </a:xfrm>
+          <a:prstGeom prst="rect">
+            <a:avLst/>
+          </a:prstGeom>
+          <a:ln w="9525">
+            <a:solidFill>
+              <a:srgbClr val="DDE1E6"/>
+            </a:solidFill>
+          </a:ln>
+        </p:spPr>
+      </p:pic>
+      <p:sp>
+        <p:nvSpPr>
+          <p:cNvPr id="5" name="TextBox 4"/>
+          <p:cNvSpPr txBox="1"/>
+          <p:nvPr/>
+        </p:nvSpPr>
+        <p:spPr>
+          <a:xfrm>
+            <a:off x="8092440" y="1371600"/>
+            <a:ext cx="3611880" cy="4572000"/>
+          </a:xfrm>
+          <a:prstGeom prst="rect">
+            <a:avLst/>
+          </a:prstGeom>
+          <a:noFill/>
+        </p:spPr>
+        <p:txBody>
+          <a:bodyPr wrap="square">
+            <a:spAutoFit/>
+          </a:bodyPr>
+          <a:lstStyle/>
+          <a:p>
+            <a:pPr algn="l">
+              <a:lnSpc>
+                <a:spcPct val="160000"/>
+              </a:lnSpc>
+            </a:pPr>
+            <a:r>
+              <a:rPr sz="1250" b="0">
                 <a:solidFill>
                   <a:srgbClr val="1A1A1A"/>
                 </a:solidFill>
                 <a:latin typeface="맑은 고딕"/>
               </a:rPr>
-              <a:t>결제 유형     충전업종(일회성 이용권) + 정기결제(월 구독)</a:t>
-            </a:r>
-          </a:p>
-          <a:p>
-            <a:pPr algn="l">
-              <a:lnSpc>
-                <a:spcPct val="190000"/>
-              </a:lnSpc>
-            </a:pPr>
-            <a:r>
-              <a:rPr sz="1500" b="0">
+              <a:t>• [신용·체크카드] → 카드사 [국민] 선택 → [결제하기]</a:t>
+            </a:r>
+          </a:p>
+          <a:p>
+            <a:pPr algn="l">
+              <a:lnSpc>
+                <a:spcPct val="160000"/>
+              </a:lnSpc>
+            </a:pPr>
+            <a:r>
+              <a:rPr sz="1250" b="0">
                 <a:solidFill>
                   <a:srgbClr val="1A1A1A"/>
                 </a:solidFill>
                 <a:latin typeface="맑은 고딕"/>
               </a:rPr>
-              <a:t>서비스 제공기간   일회성 이용권 충전일로부터 1년 / 구독 1개월 단위</a:t>
-            </a:r>
-          </a:p>
-          <a:p>
-            <a:pPr algn="l">
-              <a:lnSpc>
-                <a:spcPct val="190000"/>
-              </a:lnSpc>
-            </a:pPr>
-            <a:r>
-              <a:rPr sz="1500" b="0">
+              <a:t>• KB국민카드 인증창 예시입니다.</a:t>
+            </a:r>
+          </a:p>
+        </p:txBody>
+      </p:sp>
+    </p:spTree>
+  </p:cSld>
+  <p:clrMapOvr>
+    <a:masterClrMapping/>
+  </p:clrMapOvr>
+</p:sld>
+</file>
+
+<file path=ppt/slides/slide12.xml><?xml version="1.0" encoding="utf-8"?>
+<p:sld xmlns:a="http://schemas.openxmlformats.org/drawingml/2006/main" xmlns:p="http://schemas.openxmlformats.org/presentationml/2006/main" xmlns:r="http://schemas.openxmlformats.org/officeDocument/2006/relationships">
+  <p:cSld>
+    <p:spTree>
+      <p:nvGrpSpPr>
+        <p:cNvPr id="1" name=""/>
+        <p:cNvGrpSpPr/>
+        <p:nvPr/>
+      </p:nvGrpSpPr>
+      <p:grpSpPr/>
+      <p:sp>
+        <p:nvSpPr>
+          <p:cNvPr id="2" name="TextBox 1"/>
+          <p:cNvSpPr txBox="1"/>
+          <p:nvPr/>
+        </p:nvSpPr>
+        <p:spPr>
+          <a:xfrm>
+            <a:off x="502920" y="292608"/>
+            <a:ext cx="3657600" cy="320040"/>
+          </a:xfrm>
+          <a:prstGeom prst="rect">
+            <a:avLst/>
+          </a:prstGeom>
+          <a:noFill/>
+        </p:spPr>
+        <p:txBody>
+          <a:bodyPr wrap="square">
+            <a:spAutoFit/>
+          </a:bodyPr>
+          <a:lstStyle/>
+          <a:p>
+            <a:pPr algn="l">
+              <a:lnSpc>
+                <a:spcPct val="100000"/>
+              </a:lnSpc>
+            </a:pPr>
+            <a:r>
+              <a:rPr sz="1300" b="1">
+                <a:solidFill>
+                  <a:srgbClr val="3182F6"/>
+                </a:solidFill>
+                <a:latin typeface="맑은 고딕"/>
+              </a:rPr>
+              <a:t>⑧ 결제 후 사용처</a:t>
+            </a:r>
+          </a:p>
+        </p:txBody>
+      </p:sp>
+      <p:sp>
+        <p:nvSpPr>
+          <p:cNvPr id="3" name="TextBox 2"/>
+          <p:cNvSpPr txBox="1"/>
+          <p:nvPr/>
+        </p:nvSpPr>
+        <p:spPr>
+          <a:xfrm>
+            <a:off x="502920" y="566928"/>
+            <a:ext cx="11155680" cy="457200"/>
+          </a:xfrm>
+          <a:prstGeom prst="rect">
+            <a:avLst/>
+          </a:prstGeom>
+          <a:noFill/>
+        </p:spPr>
+        <p:txBody>
+          <a:bodyPr wrap="square">
+            <a:spAutoFit/>
+          </a:bodyPr>
+          <a:lstStyle/>
+          <a:p>
+            <a:pPr algn="l">
+              <a:lnSpc>
+                <a:spcPct val="100000"/>
+              </a:lnSpc>
+            </a:pPr>
+            <a:r>
+              <a:rPr sz="2500" b="1">
                 <a:solidFill>
                   <a:srgbClr val="1A1A1A"/>
                 </a:solidFill>
                 <a:latin typeface="맑은 고딕"/>
               </a:rPr>
-              <a:t>결제 연동     토스페이먼츠 결제위젯 (직접 연동, 호스팅사 미사용)</a:t>
-            </a:r>
-          </a:p>
-          <a:p>
-            <a:pPr algn="l">
-              <a:lnSpc>
-                <a:spcPct val="190000"/>
-              </a:lnSpc>
-            </a:pPr>
-            <a:r>
-              <a:rPr sz="1500" b="0">
+              <a:t>충전한 이용권의 사용 경로</a:t>
+            </a:r>
+          </a:p>
+        </p:txBody>
+      </p:sp>
+      <p:pic>
+        <p:nvPicPr>
+          <p:cNvPr id="4" name="Picture 3" descr="s08-usage.png"/>
+          <p:cNvPicPr>
+            <a:picLocks noChangeAspect="1"/>
+          </p:cNvPicPr>
+          <p:nvPr/>
+        </p:nvPicPr>
+        <p:blipFill>
+          <a:blip r:embed="rId2"/>
+          <a:stretch>
+            <a:fillRect/>
+          </a:stretch>
+        </p:blipFill>
+        <p:spPr>
+          <a:xfrm>
+            <a:off x="502920" y="1325880"/>
+            <a:ext cx="3141432" cy="5029200"/>
+          </a:xfrm>
+          <a:prstGeom prst="rect">
+            <a:avLst/>
+          </a:prstGeom>
+          <a:ln w="9525">
+            <a:solidFill>
+              <a:srgbClr val="DDE1E6"/>
+            </a:solidFill>
+          </a:ln>
+        </p:spPr>
+      </p:pic>
+      <p:sp>
+        <p:nvSpPr>
+          <p:cNvPr id="5" name="TextBox 4"/>
+          <p:cNvSpPr txBox="1"/>
+          <p:nvPr/>
+        </p:nvSpPr>
+        <p:spPr>
+          <a:xfrm>
+            <a:off x="8092440" y="1371600"/>
+            <a:ext cx="3611880" cy="4572000"/>
+          </a:xfrm>
+          <a:prstGeom prst="rect">
+            <a:avLst/>
+          </a:prstGeom>
+          <a:noFill/>
+        </p:spPr>
+        <p:txBody>
+          <a:bodyPr wrap="square">
+            <a:spAutoFit/>
+          </a:bodyPr>
+          <a:lstStyle/>
+          <a:p>
+            <a:pPr algn="l">
+              <a:lnSpc>
+                <a:spcPct val="160000"/>
+              </a:lnSpc>
+            </a:pPr>
+            <a:r>
+              <a:rPr sz="1250" b="0">
                 <a:solidFill>
                   <a:srgbClr val="1A1A1A"/>
                 </a:solidFill>
                 <a:latin typeface="맑은 고딕"/>
               </a:rPr>
-              <a:t>심사용 계정   요청 시 별도 전달 (비회원 접근 불가 영역 확인용)</a:t>
+              <a:t>• https://mathlab.para-x.co.kr/exam-analysis</a:t>
+            </a:r>
+          </a:p>
+          <a:p>
+            <a:pPr algn="l">
+              <a:lnSpc>
+                <a:spcPct val="160000"/>
+              </a:lnSpc>
+            </a:pPr>
+            <a:r>
+              <a:rPr sz="1250" b="0">
+                <a:solidFill>
+                  <a:srgbClr val="1A1A1A"/>
+                </a:solidFill>
+                <a:latin typeface="맑은 고딕"/>
+              </a:rPr>
+              <a:t>• 결제로 충전된 이용권은 상단에 잔여 횟수로 표시됩니다.</a:t>
+            </a:r>
+          </a:p>
+          <a:p>
+            <a:pPr algn="l">
+              <a:lnSpc>
+                <a:spcPct val="160000"/>
+              </a:lnSpc>
+            </a:pPr>
+            <a:r>
+              <a:rPr sz="1250" b="0">
+                <a:solidFill>
+                  <a:srgbClr val="1A1A1A"/>
+                </a:solidFill>
+                <a:latin typeface="맑은 고딕"/>
+              </a:rPr>
+              <a:t>• 시험지를 업로드해 분석할 때마다 이용권이 1회씩 차감됩니다.</a:t>
+            </a:r>
+          </a:p>
+          <a:p>
+            <a:pPr algn="l">
+              <a:lnSpc>
+                <a:spcPct val="160000"/>
+              </a:lnSpc>
+            </a:pPr>
+            <a:r>
+              <a:rPr sz="1250" b="0">
+                <a:solidFill>
+                  <a:srgbClr val="1A1A1A"/>
+                </a:solidFill>
+                <a:latin typeface="맑은 고딕"/>
+              </a:rPr>
+              <a:t>• 이용권이 사용되는 유일한 경로이며, 현금화·양도·대여는 불가합니다.</a:t>
+            </a:r>
+          </a:p>
+        </p:txBody>
+      </p:sp>
+    </p:spTree>
+  </p:cSld>
+  <p:clrMapOvr>
+    <a:masterClrMapping/>
+  </p:clrMapOvr>
+</p:sld>
+</file>
+
+<file path=ppt/slides/slide13.xml><?xml version="1.0" encoding="utf-8"?>
+<p:sld xmlns:a="http://schemas.openxmlformats.org/drawingml/2006/main" xmlns:p="http://schemas.openxmlformats.org/presentationml/2006/main" xmlns:r="http://schemas.openxmlformats.org/officeDocument/2006/relationships">
+  <p:cSld>
+    <p:spTree>
+      <p:nvGrpSpPr>
+        <p:cNvPr id="1" name=""/>
+        <p:cNvGrpSpPr/>
+        <p:nvPr/>
+      </p:nvGrpSpPr>
+      <p:grpSpPr/>
+      <p:sp>
+        <p:nvSpPr>
+          <p:cNvPr id="2" name="TextBox 1"/>
+          <p:cNvSpPr txBox="1"/>
+          <p:nvPr/>
+        </p:nvSpPr>
+        <p:spPr>
+          <a:xfrm>
+            <a:off x="502920" y="292608"/>
+            <a:ext cx="3657600" cy="320040"/>
+          </a:xfrm>
+          <a:prstGeom prst="rect">
+            <a:avLst/>
+          </a:prstGeom>
+          <a:noFill/>
+        </p:spPr>
+        <p:txBody>
+          <a:bodyPr wrap="square">
+            <a:spAutoFit/>
+          </a:bodyPr>
+          <a:lstStyle/>
+          <a:p>
+            <a:pPr algn="l">
+              <a:lnSpc>
+                <a:spcPct val="100000"/>
+              </a:lnSpc>
+            </a:pPr>
+            <a:r>
+              <a:rPr sz="1300" b="1">
+                <a:solidFill>
+                  <a:srgbClr val="3182F6"/>
+                </a:solidFill>
+                <a:latin typeface="맑은 고딕"/>
+              </a:rPr>
+              <a:t>정기결제</a:t>
+            </a:r>
+          </a:p>
+        </p:txBody>
+      </p:sp>
+      <p:sp>
+        <p:nvSpPr>
+          <p:cNvPr id="3" name="TextBox 2"/>
+          <p:cNvSpPr txBox="1"/>
+          <p:nvPr/>
+        </p:nvSpPr>
+        <p:spPr>
+          <a:xfrm>
+            <a:off x="502920" y="566928"/>
+            <a:ext cx="11155680" cy="457200"/>
+          </a:xfrm>
+          <a:prstGeom prst="rect">
+            <a:avLst/>
+          </a:prstGeom>
+          <a:noFill/>
+        </p:spPr>
+        <p:txBody>
+          <a:bodyPr wrap="square">
+            <a:spAutoFit/>
+          </a:bodyPr>
+          <a:lstStyle/>
+          <a:p>
+            <a:pPr algn="l">
+              <a:lnSpc>
+                <a:spcPct val="100000"/>
+              </a:lnSpc>
+            </a:pPr>
+            <a:r>
+              <a:rPr sz="2500" b="1">
+                <a:solidFill>
+                  <a:srgbClr val="1A1A1A"/>
+                </a:solidFill>
+                <a:latin typeface="맑은 고딕"/>
+              </a:rPr>
+              <a:t>정기결제(월 구독) 경로</a:t>
+            </a:r>
+          </a:p>
+        </p:txBody>
+      </p:sp>
+      <p:pic>
+        <p:nvPicPr>
+          <p:cNvPr id="4" name="Picture 3" descr="08-sub-checkout.png"/>
+          <p:cNvPicPr>
+            <a:picLocks noChangeAspect="1"/>
+          </p:cNvPicPr>
+          <p:nvPr/>
+        </p:nvPicPr>
+        <p:blipFill>
+          <a:blip r:embed="rId2"/>
+          <a:stretch>
+            <a:fillRect/>
+          </a:stretch>
+        </p:blipFill>
+        <p:spPr>
+          <a:xfrm>
+            <a:off x="502920" y="1325880"/>
+            <a:ext cx="3141432" cy="5029200"/>
+          </a:xfrm>
+          <a:prstGeom prst="rect">
+            <a:avLst/>
+          </a:prstGeom>
+          <a:ln w="9525">
+            <a:solidFill>
+              <a:srgbClr val="DDE1E6"/>
+            </a:solidFill>
+          </a:ln>
+        </p:spPr>
+      </p:pic>
+      <p:sp>
+        <p:nvSpPr>
+          <p:cNvPr id="5" name="TextBox 4"/>
+          <p:cNvSpPr txBox="1"/>
+          <p:nvPr/>
+        </p:nvSpPr>
+        <p:spPr>
+          <a:xfrm>
+            <a:off x="8092440" y="1371600"/>
+            <a:ext cx="3611880" cy="4572000"/>
+          </a:xfrm>
+          <a:prstGeom prst="rect">
+            <a:avLst/>
+          </a:prstGeom>
+          <a:noFill/>
+        </p:spPr>
+        <p:txBody>
+          <a:bodyPr wrap="square">
+            <a:spAutoFit/>
+          </a:bodyPr>
+          <a:lstStyle/>
+          <a:p>
+            <a:pPr algn="l">
+              <a:lnSpc>
+                <a:spcPct val="160000"/>
+              </a:lnSpc>
+            </a:pPr>
+            <a:r>
+              <a:rPr sz="1250" b="0">
+                <a:solidFill>
+                  <a:srgbClr val="1A1A1A"/>
+                </a:solidFill>
+                <a:latin typeface="맑은 고딕"/>
+              </a:rPr>
+              <a:t>• https://mathlab.para-x.co.kr/billing → [구독하기]</a:t>
+            </a:r>
+          </a:p>
+          <a:p>
+            <a:pPr algn="l">
+              <a:lnSpc>
+                <a:spcPct val="160000"/>
+              </a:lnSpc>
+            </a:pPr>
+            <a:r>
+              <a:rPr sz="1250" b="0">
+                <a:solidFill>
+                  <a:srgbClr val="1A1A1A"/>
+                </a:solidFill>
+                <a:latin typeface="맑은 고딕"/>
+              </a:rPr>
+              <a:t>• 월 구독은 카드 등록(빌링) 방식으로, 일회성 결제와 화면이 다릅니다.</a:t>
+            </a:r>
+          </a:p>
+          <a:p>
+            <a:pPr algn="l">
+              <a:lnSpc>
+                <a:spcPct val="160000"/>
+              </a:lnSpc>
+            </a:pPr>
+            <a:r>
+              <a:rPr sz="1250" b="0">
+                <a:solidFill>
+                  <a:srgbClr val="1A1A1A"/>
+                </a:solidFill>
+                <a:latin typeface="맑은 고딕"/>
+              </a:rPr>
+              <a:t>• [카드 등록하고 구독 시작] → 카드사 인증 → 매월 자동 결제 및 이용권 자동 충전</a:t>
+            </a:r>
+          </a:p>
+          <a:p>
+            <a:pPr algn="l">
+              <a:lnSpc>
+                <a:spcPct val="160000"/>
+              </a:lnSpc>
+            </a:pPr>
+            <a:r>
+              <a:rPr sz="1250" b="0">
+                <a:solidFill>
+                  <a:srgbClr val="1A1A1A"/>
+                </a:solidFill>
+                <a:latin typeface="맑은 고딕"/>
+              </a:rPr>
+              <a:t>• 구독은 결제 화면의 [구독 관리]에서 언제든 직접 해지할 수 있습니다.</a:t>
+            </a:r>
+          </a:p>
+        </p:txBody>
+      </p:sp>
+    </p:spTree>
+  </p:cSld>
+  <p:clrMapOvr>
+    <a:masterClrMapping/>
+  </p:clrMapOvr>
+</p:sld>
+</file>
+
+<file path=ppt/slides/slide14.xml><?xml version="1.0" encoding="utf-8"?>
+<p:sld xmlns:a="http://schemas.openxmlformats.org/drawingml/2006/main" xmlns:p="http://schemas.openxmlformats.org/presentationml/2006/main" xmlns:r="http://schemas.openxmlformats.org/officeDocument/2006/relationships">
+  <p:cSld>
+    <p:spTree>
+      <p:nvGrpSpPr>
+        <p:cNvPr id="1" name=""/>
+        <p:cNvGrpSpPr/>
+        <p:nvPr/>
+      </p:nvGrpSpPr>
+      <p:grpSpPr/>
+      <p:sp>
+        <p:nvSpPr>
+          <p:cNvPr id="2" name="TextBox 1"/>
+          <p:cNvSpPr txBox="1"/>
+          <p:nvPr/>
+        </p:nvSpPr>
+        <p:spPr>
+          <a:xfrm>
+            <a:off x="502920" y="292608"/>
+            <a:ext cx="3657600" cy="320040"/>
+          </a:xfrm>
+          <a:prstGeom prst="rect">
+            <a:avLst/>
+          </a:prstGeom>
+          <a:noFill/>
+        </p:spPr>
+        <p:txBody>
+          <a:bodyPr wrap="square">
+            <a:spAutoFit/>
+          </a:bodyPr>
+          <a:lstStyle/>
+          <a:p>
+            <a:pPr algn="l">
+              <a:lnSpc>
+                <a:spcPct val="100000"/>
+              </a:lnSpc>
+            </a:pPr>
+            <a:r>
+              <a:rPr sz="1300" b="1">
+                <a:solidFill>
+                  <a:srgbClr val="3182F6"/>
+                </a:solidFill>
+                <a:latin typeface="맑은 고딕"/>
+              </a:rPr>
+              <a:t>부록</a:t>
+            </a:r>
+          </a:p>
+        </p:txBody>
+      </p:sp>
+      <p:sp>
+        <p:nvSpPr>
+          <p:cNvPr id="3" name="TextBox 2"/>
+          <p:cNvSpPr txBox="1"/>
+          <p:nvPr/>
+        </p:nvSpPr>
+        <p:spPr>
+          <a:xfrm>
+            <a:off x="502920" y="566928"/>
+            <a:ext cx="11155680" cy="457200"/>
+          </a:xfrm>
+          <a:prstGeom prst="rect">
+            <a:avLst/>
+          </a:prstGeom>
+          <a:noFill/>
+        </p:spPr>
+        <p:txBody>
+          <a:bodyPr wrap="square">
+            <a:spAutoFit/>
+          </a:bodyPr>
+          <a:lstStyle/>
+          <a:p>
+            <a:pPr algn="l">
+              <a:lnSpc>
+                <a:spcPct val="100000"/>
+              </a:lnSpc>
+            </a:pPr>
+            <a:r>
+              <a:rPr sz="2500" b="1">
+                <a:solidFill>
+                  <a:srgbClr val="1A1A1A"/>
+                </a:solidFill>
+                <a:latin typeface="맑은 고딕"/>
+              </a:rPr>
+              <a:t>결제 완료 및 지급 (참고)</a:t>
+            </a:r>
+          </a:p>
+        </p:txBody>
+      </p:sp>
+      <p:pic>
+        <p:nvPicPr>
+          <p:cNvPr id="4" name="Picture 3" descr="06-success.png"/>
+          <p:cNvPicPr>
+            <a:picLocks noChangeAspect="1"/>
+          </p:cNvPicPr>
+          <p:nvPr/>
+        </p:nvPicPr>
+        <p:blipFill>
+          <a:blip r:embed="rId2"/>
+          <a:stretch>
+            <a:fillRect/>
+          </a:stretch>
+        </p:blipFill>
+        <p:spPr>
+          <a:xfrm>
+            <a:off x="502920" y="1325880"/>
+            <a:ext cx="3141432" cy="5029200"/>
+          </a:xfrm>
+          <a:prstGeom prst="rect">
+            <a:avLst/>
+          </a:prstGeom>
+          <a:ln w="9525">
+            <a:solidFill>
+              <a:srgbClr val="DDE1E6"/>
+            </a:solidFill>
+          </a:ln>
+        </p:spPr>
+      </p:pic>
+      <p:sp>
+        <p:nvSpPr>
+          <p:cNvPr id="5" name="TextBox 4"/>
+          <p:cNvSpPr txBox="1"/>
+          <p:nvPr/>
+        </p:nvSpPr>
+        <p:spPr>
+          <a:xfrm>
+            <a:off x="8092440" y="1371600"/>
+            <a:ext cx="3611880" cy="4572000"/>
+          </a:xfrm>
+          <a:prstGeom prst="rect">
+            <a:avLst/>
+          </a:prstGeom>
+          <a:noFill/>
+        </p:spPr>
+        <p:txBody>
+          <a:bodyPr wrap="square">
+            <a:spAutoFit/>
+          </a:bodyPr>
+          <a:lstStyle/>
+          <a:p>
+            <a:pPr algn="l">
+              <a:lnSpc>
+                <a:spcPct val="160000"/>
+              </a:lnSpc>
+            </a:pPr>
+            <a:r>
+              <a:rPr sz="1250" b="0">
+                <a:solidFill>
+                  <a:srgbClr val="1A1A1A"/>
+                </a:solidFill>
+                <a:latin typeface="맑은 고딕"/>
+              </a:rPr>
+              <a:t>• 가이드상 결제 완료 화면은 필수 캡처 대상이 아니나, 상품 지급 근거로 첨부합니다.</a:t>
+            </a:r>
+          </a:p>
+          <a:p>
+            <a:pPr algn="l">
+              <a:lnSpc>
+                <a:spcPct val="160000"/>
+              </a:lnSpc>
+            </a:pPr>
+            <a:r>
+              <a:rPr sz="1250" b="0">
+                <a:solidFill>
+                  <a:srgbClr val="1A1A1A"/>
+                </a:solidFill>
+                <a:latin typeface="맑은 고딕"/>
+              </a:rPr>
+              <a:t>• 결제 승인 즉시 이용권이 학원 계정에 자동 지급됩니다.</a:t>
+            </a:r>
+          </a:p>
+          <a:p>
+            <a:pPr algn="l">
+              <a:lnSpc>
+                <a:spcPct val="160000"/>
+              </a:lnSpc>
+            </a:pPr>
+            <a:r>
+              <a:rPr sz="1250" b="0">
+                <a:solidFill>
+                  <a:srgbClr val="1A1A1A"/>
+                </a:solidFill>
+                <a:latin typeface="맑은 고딕"/>
+              </a:rPr>
+              <a:t>• 결제금액 · 충전 수량 · 주문번호를 표시하고 영수증을 제공합니다.</a:t>
             </a:r>
           </a:p>
         </p:txBody>
@@ -3391,7 +4735,7 @@
         <p:spPr>
           <a:xfrm>
             <a:off x="502920" y="292608"/>
-            <a:ext cx="1828800" cy="320040"/>
+            <a:ext cx="3657600" cy="320040"/>
           </a:xfrm>
           <a:prstGeom prst="rect">
             <a:avLst/>
@@ -3416,7 +4760,7 @@
                 </a:solidFill>
                 <a:latin typeface="맑은 고딕"/>
               </a:rPr>
-              <a:t>STEP 1</a:t>
+              <a:t>② 하단정보</a:t>
             </a:r>
           </a:p>
         </p:txBody>
@@ -3449,20 +4793,20 @@
               </a:lnSpc>
             </a:pPr>
             <a:r>
-              <a:rPr sz="2600" b="1">
+              <a:rPr sz="2500" b="1">
                 <a:solidFill>
                   <a:srgbClr val="1A1A1A"/>
                 </a:solidFill>
                 <a:latin typeface="맑은 고딕"/>
               </a:rPr>
-              <a:t>메인 페이지</a:t>
+              <a:t>사업자정보 (하단 푸터)</a:t>
             </a:r>
           </a:p>
         </p:txBody>
       </p:sp>
       <p:pic>
         <p:nvPicPr>
-          <p:cNvPr id="4" name="Picture 3" descr="01-main.png"/>
+          <p:cNvPr id="4" name="Picture 3" descr="02-footer.png"/>
           <p:cNvPicPr>
             <a:picLocks noChangeAspect="1"/>
           </p:cNvPicPr>
@@ -3523,7 +4867,7 @@
                 </a:solidFill>
                 <a:latin typeface="맑은 고딕"/>
               </a:rPr>
-              <a:t>• https://mathlab.para-x.co.kr</a:t>
+              <a:t>• 상호명 · 사업자번호 · 대표자명 · 사업장주소 · 상점 전화번호를 하단에 표기합니다.</a:t>
             </a:r>
           </a:p>
           <a:p>
@@ -3539,7 +4883,7 @@
                 </a:solidFill>
                 <a:latin typeface="맑은 고딕"/>
               </a:rPr>
-              <a:t>• 서비스 소개 페이지입니다. 상단 우측 [로그인] 후 [결제] 메뉴로 이동합니다.</a:t>
+              <a:t>• 통신판매업 신고번호: 신고 진행 중이며, 발급 즉시 동일 영역에 기재할 예정입니다.</a:t>
             </a:r>
           </a:p>
           <a:p>
@@ -3555,7 +4899,7 @@
                 </a:solidFill>
                 <a:latin typeface="맑은 고딕"/>
               </a:rPr>
-              <a:t>• 비회원도 서비스 내용과 가격 정책을 확인할 수 있습니다.</a:t>
+              <a:t>• 이용약관 / 개인정보처리방침 / 취소·환불 정책 링크를 함께 제공합니다.</a:t>
             </a:r>
           </a:p>
         </p:txBody>
@@ -3587,7 +4931,7 @@
         <p:spPr>
           <a:xfrm>
             <a:off x="502920" y="292608"/>
-            <a:ext cx="1828800" cy="320040"/>
+            <a:ext cx="3657600" cy="320040"/>
           </a:xfrm>
           <a:prstGeom prst="rect">
             <a:avLst/>
@@ -3612,7 +4956,7 @@
                 </a:solidFill>
                 <a:latin typeface="맑은 고딕"/>
               </a:rPr>
-              <a:t>STEP 1-1</a:t>
+              <a:t>③ 약관</a:t>
             </a:r>
           </a:p>
         </p:txBody>
@@ -3645,20 +4989,20 @@
               </a:lnSpc>
             </a:pPr>
             <a:r>
-              <a:rPr sz="2600" b="1">
+              <a:rPr sz="2500" b="1">
                 <a:solidFill>
                   <a:srgbClr val="1A1A1A"/>
                 </a:solidFill>
                 <a:latin typeface="맑은 고딕"/>
               </a:rPr>
-              <a:t>사업자정보 (하단 푸터)</a:t>
+              <a:t>이용약관</a:t>
             </a:r>
           </a:p>
         </p:txBody>
       </p:sp>
       <p:pic>
         <p:nvPicPr>
-          <p:cNvPr id="4" name="Picture 3" descr="02-footer.png"/>
+          <p:cNvPr id="4" name="Picture 3" descr="s03-terms.png"/>
           <p:cNvPicPr>
             <a:picLocks noChangeAspect="1"/>
           </p:cNvPicPr>
@@ -3719,7 +5063,7 @@
                 </a:solidFill>
                 <a:latin typeface="맑은 고딕"/>
               </a:rPr>
-              <a:t>• 상호 · 대표자명 · 사업자등록번호 · 사업장 주소 · 유선번호 · 개인정보보호책임자를 표기합니다.</a:t>
+              <a:t>• https://para-x.co.kr/terms.html</a:t>
             </a:r>
           </a:p>
           <a:p>
@@ -3735,7 +5079,7 @@
                 </a:solidFill>
                 <a:latin typeface="맑은 고딕"/>
               </a:rPr>
-              <a:t>• 통신판매업 신고번호는 신고 완료 후 이 영역에 추가 기재할 예정입니다.</a:t>
+              <a:t>• 서비스 이용 조건, 이용권의 성격(현금화·양도·대여 불가), 해지 조건을 명시합니다.</a:t>
             </a:r>
           </a:p>
           <a:p>
@@ -3751,7 +5095,7 @@
                 </a:solidFill>
                 <a:latin typeface="맑은 고딕"/>
               </a:rPr>
-              <a:t>• 이용약관 / 개인정보처리방침 / 취소·환불 정책 링크를 함께 제공합니다.</a:t>
+              <a:t>• 모든 페이지 하단에서 접근할 수 있습니다.</a:t>
             </a:r>
           </a:p>
         </p:txBody>
@@ -3783,7 +5127,7 @@
         <p:spPr>
           <a:xfrm>
             <a:off x="502920" y="292608"/>
-            <a:ext cx="1828800" cy="320040"/>
+            <a:ext cx="3657600" cy="320040"/>
           </a:xfrm>
           <a:prstGeom prst="rect">
             <a:avLst/>
@@ -3808,7 +5152,7 @@
                 </a:solidFill>
                 <a:latin typeface="맑은 고딕"/>
               </a:rPr>
-              <a:t>STEP 2</a:t>
+              <a:t>④ 환불 규정</a:t>
             </a:r>
           </a:p>
         </p:txBody>
@@ -3841,20 +5185,20 @@
               </a:lnSpc>
             </a:pPr>
             <a:r>
-              <a:rPr sz="2600" b="1">
+              <a:rPr sz="2500" b="1">
                 <a:solidFill>
                   <a:srgbClr val="1A1A1A"/>
                 </a:solidFill>
                 <a:latin typeface="맑은 고딕"/>
               </a:rPr>
-              <a:t>상품 선택</a:t>
+              <a:t>취소·환불 정책</a:t>
             </a:r>
           </a:p>
         </p:txBody>
       </p:sp>
       <p:pic>
         <p:nvPicPr>
-          <p:cNvPr id="4" name="Picture 3" descr="03-products.png"/>
+          <p:cNvPr id="4" name="Picture 3" descr="07-refund.png"/>
           <p:cNvPicPr>
             <a:picLocks noChangeAspect="1"/>
           </p:cNvPicPr>
@@ -3915,7 +5259,7 @@
                 </a:solidFill>
                 <a:latin typeface="맑은 고딕"/>
               </a:rPr>
-              <a:t>• https://mathlab.para-x.co.kr/billing</a:t>
+              <a:t>• https://para-x.co.kr/refund.html</a:t>
             </a:r>
           </a:p>
           <a:p>
@@ -3931,7 +5275,7 @@
                 </a:solidFill>
                 <a:latin typeface="맑은 고딕"/>
               </a:rPr>
-              <a:t>• 월 결제(정기결제) 3종과 횟수 결제(일회성 이용권) 3종을 판매합니다.</a:t>
+              <a:t>• 무형(디지털) 재화로 배송 개념이 없으며, 서비스 제공기간은 충전일로부터 1년입니다.</a:t>
             </a:r>
           </a:p>
           <a:p>
@@ -3947,7 +5291,7 @@
                 </a:solidFill>
                 <a:latin typeface="맑은 고딕"/>
               </a:rPr>
-              <a:t>• 모든 상품에 판매 가격을 표기하며, 표기 금액과 실제 결제 금액은 동일합니다.</a:t>
+              <a:t>• 결제일로부터 7일 이내 미사용분 전액 환불.</a:t>
             </a:r>
           </a:p>
           <a:p>
@@ -3963,7 +5307,7 @@
                 </a:solidFill>
                 <a:latin typeface="맑은 고딕"/>
               </a:rPr>
-              <a:t>• 예시: [기출분석 3회 ₩30,000] 클릭 → 결제 화면으로 이동</a:t>
+              <a:t>• 일부 사용 시 사용분을 차감한 잔여분 환불 / 정기결제는 이용 일수 일할 계산.</a:t>
             </a:r>
           </a:p>
         </p:txBody>
@@ -3995,7 +5339,7 @@
         <p:spPr>
           <a:xfrm>
             <a:off x="502920" y="292608"/>
-            <a:ext cx="1828800" cy="320040"/>
+            <a:ext cx="3657600" cy="320040"/>
           </a:xfrm>
           <a:prstGeom prst="rect">
             <a:avLst/>
@@ -4020,7 +5364,7 @@
                 </a:solidFill>
                 <a:latin typeface="맑은 고딕"/>
               </a:rPr>
-              <a:t>STEP 3</a:t>
+              <a:t>⑤ 로그인 경로</a:t>
             </a:r>
           </a:p>
         </p:txBody>
@@ -4053,20 +5397,20 @@
               </a:lnSpc>
             </a:pPr>
             <a:r>
-              <a:rPr sz="2600" b="1">
+              <a:rPr sz="2500" b="1">
                 <a:solidFill>
                   <a:srgbClr val="1A1A1A"/>
                 </a:solidFill>
                 <a:latin typeface="맑은 고딕"/>
               </a:rPr>
-              <a:t>결제</a:t>
+              <a:t>로그인</a:t>
             </a:r>
           </a:p>
         </p:txBody>
       </p:sp>
       <p:pic>
         <p:nvPicPr>
-          <p:cNvPr id="4" name="Picture 3" descr="04-checkout.png"/>
+          <p:cNvPr id="4" name="Picture 3" descr="s05-login.png"/>
           <p:cNvPicPr>
             <a:picLocks noChangeAspect="1"/>
           </p:cNvPicPr>
@@ -4127,7 +5471,7 @@
                 </a:solidFill>
                 <a:latin typeface="맑은 고딕"/>
               </a:rPr>
-              <a:t>• https://para-x.co.kr/checkout.html</a:t>
+              <a:t>• https://mathlab.para-x.co.kr/login</a:t>
             </a:r>
           </a:p>
           <a:p>
@@ -4143,7 +5487,7 @@
                 </a:solidFill>
                 <a:latin typeface="맑은 고딕"/>
               </a:rPr>
-              <a:t>• 주문 내용(상품명 · 주문번호 · 결제금액)과 서비스 제공기간을 표시합니다.</a:t>
+              <a:t>• 학원 단위로 계정을 발급하는 B2B 서비스로, 구매는 로그인 후 진행합니다.</a:t>
             </a:r>
           </a:p>
           <a:p>
@@ -4159,23 +5503,7 @@
                 </a:solidFill>
                 <a:latin typeface="맑은 고딕"/>
               </a:rPr>
-              <a:t>• 결제수단: 신용·체크카드 / 퀵계좌이체 / 토스페이 / 페이코 / 카카오페이 / 네이버페이</a:t>
-            </a:r>
-          </a:p>
-          <a:p>
-            <a:pPr algn="l">
-              <a:lnSpc>
-                <a:spcPct val="160000"/>
-              </a:lnSpc>
-            </a:pPr>
-            <a:r>
-              <a:rPr sz="1250" b="0">
-                <a:solidFill>
-                  <a:srgbClr val="1A1A1A"/>
-                </a:solidFill>
-                <a:latin typeface="맑은 고딕"/>
-              </a:rPr>
-              <a:t>• 결제 서비스 이용약관 및 개인정보 처리 동의 후 [결제하기]를 누릅니다.</a:t>
+              <a:t>• 비회원 구매는 제공하지 않으므로 심사용 테스트 계정을 표지에 기재했습니다.</a:t>
             </a:r>
           </a:p>
         </p:txBody>
@@ -4207,7 +5535,7 @@
         <p:spPr>
           <a:xfrm>
             <a:off x="502920" y="292608"/>
-            <a:ext cx="1828800" cy="320040"/>
+            <a:ext cx="3657600" cy="320040"/>
           </a:xfrm>
           <a:prstGeom prst="rect">
             <a:avLst/>
@@ -4232,7 +5560,7 @@
                 </a:solidFill>
                 <a:latin typeface="맑은 고딕"/>
               </a:rPr>
-              <a:t>STEP 4</a:t>
+              <a:t>⑥-1 상품선택</a:t>
             </a:r>
           </a:p>
         </p:txBody>
@@ -4265,20 +5593,20 @@
               </a:lnSpc>
             </a:pPr>
             <a:r>
-              <a:rPr sz="2600" b="1">
+              <a:rPr sz="2500" b="1">
                 <a:solidFill>
                   <a:srgbClr val="1A1A1A"/>
                 </a:solidFill>
                 <a:latin typeface="맑은 고딕"/>
               </a:rPr>
-              <a:t>결제창 확인 (신용카드)</a:t>
+              <a:t>메인 페이지</a:t>
             </a:r>
           </a:p>
         </p:txBody>
       </p:sp>
       <p:pic>
         <p:nvPicPr>
-          <p:cNvPr id="4" name="Picture 3" descr="05-paywindow.png"/>
+          <p:cNvPr id="4" name="Picture 3" descr="01-main.png"/>
           <p:cNvPicPr>
             <a:picLocks noChangeAspect="1"/>
           </p:cNvPicPr>
@@ -4339,7 +5667,7 @@
                 </a:solidFill>
                 <a:latin typeface="맑은 고딕"/>
               </a:rPr>
-              <a:t>• [신용·체크카드] 선택 → 카드사 선택 → [결제하기] 클릭 시 카드사 인증창이 열립니다.</a:t>
+              <a:t>• https://mathlab.para-x.co.kr</a:t>
             </a:r>
           </a:p>
           <a:p>
@@ -4355,23 +5683,7 @@
                 </a:solidFill>
                 <a:latin typeface="맑은 고딕"/>
               </a:rPr>
-              <a:t>• 화면은 KB국민카드 인증창 예시입니다.</a:t>
-            </a:r>
-          </a:p>
-          <a:p>
-            <a:pPr algn="l">
-              <a:lnSpc>
-                <a:spcPct val="160000"/>
-              </a:lnSpc>
-            </a:pPr>
-            <a:r>
-              <a:rPr sz="1250" b="0">
-                <a:solidFill>
-                  <a:srgbClr val="1A1A1A"/>
-                </a:solidFill>
-                <a:latin typeface="맑은 고딕"/>
-              </a:rPr>
-              <a:t>• 카드사 인증 완료 시 결제가 승인됩니다.</a:t>
+              <a:t>• 서비스 소개와 기능을 안내합니다. 로그인 후 상단 [결제] 메뉴로 이동합니다.</a:t>
             </a:r>
           </a:p>
         </p:txBody>
@@ -4403,7 +5715,7 @@
         <p:spPr>
           <a:xfrm>
             <a:off x="502920" y="292608"/>
-            <a:ext cx="1828800" cy="320040"/>
+            <a:ext cx="3657600" cy="320040"/>
           </a:xfrm>
           <a:prstGeom prst="rect">
             <a:avLst/>
@@ -4428,7 +5740,7 @@
                 </a:solidFill>
                 <a:latin typeface="맑은 고딕"/>
               </a:rPr>
-              <a:t>STEP 5</a:t>
+              <a:t>⑥-2 상품선택</a:t>
             </a:r>
           </a:p>
         </p:txBody>
@@ -4461,20 +5773,20 @@
               </a:lnSpc>
             </a:pPr>
             <a:r>
-              <a:rPr sz="2600" b="1">
+              <a:rPr sz="2500" b="1">
                 <a:solidFill>
                   <a:srgbClr val="1A1A1A"/>
                 </a:solidFill>
                 <a:latin typeface="맑은 고딕"/>
               </a:rPr>
-              <a:t>결제 완료 및 상품 지급</a:t>
+              <a:t>상품 목록 및 판매가</a:t>
             </a:r>
           </a:p>
         </p:txBody>
       </p:sp>
       <p:pic>
         <p:nvPicPr>
-          <p:cNvPr id="4" name="Picture 3" descr="06-success.png"/>
+          <p:cNvPr id="4" name="Picture 3" descr="03-products.png"/>
           <p:cNvPicPr>
             <a:picLocks noChangeAspect="1"/>
           </p:cNvPicPr>
@@ -4535,7 +5847,7 @@
                 </a:solidFill>
                 <a:latin typeface="맑은 고딕"/>
               </a:rPr>
-              <a:t>• 결제 승인 즉시 이용권이 학원 계정에 자동 지급됩니다.</a:t>
+              <a:t>• https://mathlab.para-x.co.kr/billing</a:t>
             </a:r>
           </a:p>
           <a:p>
@@ -4551,7 +5863,7 @@
                 </a:solidFill>
                 <a:latin typeface="맑은 고딕"/>
               </a:rPr>
-              <a:t>• 결제금액 · 충전 수량 · 주문번호를 표시하고 영수증을 제공합니다.</a:t>
+              <a:t>• 월 결제(정기결제) 3종: Basic ₩80,000 / Pro ₩133,000 / Enterprise ₩280,000 (월)</a:t>
             </a:r>
           </a:p>
           <a:p>
@@ -4567,7 +5879,23 @@
                 </a:solidFill>
                 <a:latin typeface="맑은 고딕"/>
               </a:rPr>
-              <a:t>• [MathLAB으로 돌아가기]로 지급된 이용권을 즉시 확인·사용할 수 있습니다.</a:t>
+              <a:t>• 횟수 결제(일회성 이용권) 3종: 3회 ₩30,000 / 10회 ₩80,000 / 30회 ₩210,000</a:t>
+            </a:r>
+          </a:p>
+          <a:p>
+            <a:pPr algn="l">
+              <a:lnSpc>
+                <a:spcPct val="160000"/>
+              </a:lnSpc>
+            </a:pPr>
+            <a:r>
+              <a:rPr sz="1250" b="0">
+                <a:solidFill>
+                  <a:srgbClr val="1A1A1A"/>
+                </a:solidFill>
+                <a:latin typeface="맑은 고딕"/>
+              </a:rPr>
+              <a:t>• 모든 상품에 판매가를 표기하며, 표기 금액과 실제 결제 금액은 동일합니다.</a:t>
             </a:r>
           </a:p>
         </p:txBody>
@@ -4599,7 +5927,7 @@
         <p:spPr>
           <a:xfrm>
             <a:off x="502920" y="292608"/>
-            <a:ext cx="1828800" cy="320040"/>
+            <a:ext cx="3657600" cy="320040"/>
           </a:xfrm>
           <a:prstGeom prst="rect">
             <a:avLst/>
@@ -4624,7 +5952,7 @@
                 </a:solidFill>
                 <a:latin typeface="맑은 고딕"/>
               </a:rPr>
-              <a:t>참고</a:t>
+              <a:t>⑥-3 구매과정</a:t>
             </a:r>
           </a:p>
         </p:txBody>
@@ -4657,20 +5985,20 @@
               </a:lnSpc>
             </a:pPr>
             <a:r>
-              <a:rPr sz="2600" b="1">
+              <a:rPr sz="2500" b="1">
                 <a:solidFill>
                   <a:srgbClr val="1A1A1A"/>
                 </a:solidFill>
                 <a:latin typeface="맑은 고딕"/>
               </a:rPr>
-              <a:t>취소·환불 정책</a:t>
+              <a:t>결제 (일회성 이용권)</a:t>
             </a:r>
           </a:p>
         </p:txBody>
       </p:sp>
       <p:pic>
         <p:nvPicPr>
-          <p:cNvPr id="4" name="Picture 3" descr="07-refund.png"/>
+          <p:cNvPr id="4" name="Picture 3" descr="04-checkout.png"/>
           <p:cNvPicPr>
             <a:picLocks noChangeAspect="1"/>
           </p:cNvPicPr>
@@ -4731,7 +6059,7 @@
                 </a:solidFill>
                 <a:latin typeface="맑은 고딕"/>
               </a:rPr>
-              <a:t>• https://para-x.co.kr/refund.html</a:t>
+              <a:t>• https://para-x.co.kr/checkout.html</a:t>
             </a:r>
           </a:p>
           <a:p>
@@ -4747,7 +6075,7 @@
                 </a:solidFill>
                 <a:latin typeface="맑은 고딕"/>
               </a:rPr>
-              <a:t>• 무형(디지털) 재화로, 서비스 제공기간은 충전일로부터 1년입니다.</a:t>
+              <a:t>• 주문 내용(상품명 · 주문번호 · 결제금액)과 서비스 제공기간을 표시합니다.</a:t>
             </a:r>
           </a:p>
           <a:p>
@@ -4763,7 +6091,7 @@
                 </a:solidFill>
                 <a:latin typeface="맑은 고딕"/>
               </a:rPr>
-              <a:t>• 결제일로부터 7일 이내 미사용분 전액 환불, 일부 사용 시 잔여분 환불(정기결제는 일할 계산).</a:t>
+              <a:t>• 결제수단: 신용·체크카드 / 퀵계좌이체 / 토스페이 / 페이코 / 카카오페이 / 네이버페이</a:t>
             </a:r>
           </a:p>
           <a:p>
@@ -4779,7 +6107,203 @@
                 </a:solidFill>
                 <a:latin typeface="맑은 고딕"/>
               </a:rPr>
-              <a:t>• 결제 화면과 상품 안내에도 유효기간을 함께 표기합니다.</a:t>
+              <a:t>• 결제 서비스 이용약관 및 개인정보 처리 동의 후 [결제하기]를 누릅니다.</a:t>
+            </a:r>
+          </a:p>
+        </p:txBody>
+      </p:sp>
+    </p:spTree>
+  </p:cSld>
+  <p:clrMapOvr>
+    <a:masterClrMapping/>
+  </p:clrMapOvr>
+</p:sld>
+</file>
+
+<file path=ppt/slides/slide9.xml><?xml version="1.0" encoding="utf-8"?>
+<p:sld xmlns:a="http://schemas.openxmlformats.org/drawingml/2006/main" xmlns:p="http://schemas.openxmlformats.org/presentationml/2006/main" xmlns:r="http://schemas.openxmlformats.org/officeDocument/2006/relationships">
+  <p:cSld>
+    <p:spTree>
+      <p:nvGrpSpPr>
+        <p:cNvPr id="1" name=""/>
+        <p:cNvGrpSpPr/>
+        <p:nvPr/>
+      </p:nvGrpSpPr>
+      <p:grpSpPr/>
+      <p:sp>
+        <p:nvSpPr>
+          <p:cNvPr id="2" name="TextBox 1"/>
+          <p:cNvSpPr txBox="1"/>
+          <p:nvPr/>
+        </p:nvSpPr>
+        <p:spPr>
+          <a:xfrm>
+            <a:off x="502920" y="292608"/>
+            <a:ext cx="3657600" cy="320040"/>
+          </a:xfrm>
+          <a:prstGeom prst="rect">
+            <a:avLst/>
+          </a:prstGeom>
+          <a:noFill/>
+        </p:spPr>
+        <p:txBody>
+          <a:bodyPr wrap="square">
+            <a:spAutoFit/>
+          </a:bodyPr>
+          <a:lstStyle/>
+          <a:p>
+            <a:pPr algn="l">
+              <a:lnSpc>
+                <a:spcPct val="100000"/>
+              </a:lnSpc>
+            </a:pPr>
+            <a:r>
+              <a:rPr sz="1300" b="1">
+                <a:solidFill>
+                  <a:srgbClr val="3182F6"/>
+                </a:solidFill>
+                <a:latin typeface="맑은 고딕"/>
+              </a:rPr>
+              <a:t>⑦-1 카드 결제경로</a:t>
+            </a:r>
+          </a:p>
+        </p:txBody>
+      </p:sp>
+      <p:sp>
+        <p:nvSpPr>
+          <p:cNvPr id="3" name="TextBox 2"/>
+          <p:cNvSpPr txBox="1"/>
+          <p:nvPr/>
+        </p:nvSpPr>
+        <p:spPr>
+          <a:xfrm>
+            <a:off x="502920" y="566928"/>
+            <a:ext cx="11155680" cy="457200"/>
+          </a:xfrm>
+          <a:prstGeom prst="rect">
+            <a:avLst/>
+          </a:prstGeom>
+          <a:noFill/>
+        </p:spPr>
+        <p:txBody>
+          <a:bodyPr wrap="square">
+            <a:spAutoFit/>
+          </a:bodyPr>
+          <a:lstStyle/>
+          <a:p>
+            <a:pPr algn="l">
+              <a:lnSpc>
+                <a:spcPct val="100000"/>
+              </a:lnSpc>
+            </a:pPr>
+            <a:r>
+              <a:rPr sz="2500" b="1">
+                <a:solidFill>
+                  <a:srgbClr val="1A1A1A"/>
+                </a:solidFill>
+                <a:latin typeface="맑은 고딕"/>
+              </a:rPr>
+              <a:t>카드사 인증창 — 비씨카드</a:t>
+            </a:r>
+          </a:p>
+        </p:txBody>
+      </p:sp>
+      <p:pic>
+        <p:nvPicPr>
+          <p:cNvPr id="4" name="Picture 3" descr="s07a-card-bc.png"/>
+          <p:cNvPicPr>
+            <a:picLocks noChangeAspect="1"/>
+          </p:cNvPicPr>
+          <p:nvPr/>
+        </p:nvPicPr>
+        <p:blipFill>
+          <a:blip r:embed="rId2"/>
+          <a:stretch>
+            <a:fillRect/>
+          </a:stretch>
+        </p:blipFill>
+        <p:spPr>
+          <a:xfrm>
+            <a:off x="502920" y="1325880"/>
+            <a:ext cx="7264400" cy="5029200"/>
+          </a:xfrm>
+          <a:prstGeom prst="rect">
+            <a:avLst/>
+          </a:prstGeom>
+          <a:ln w="9525">
+            <a:solidFill>
+              <a:srgbClr val="DDE1E6"/>
+            </a:solidFill>
+          </a:ln>
+        </p:spPr>
+      </p:pic>
+      <p:sp>
+        <p:nvSpPr>
+          <p:cNvPr id="5" name="TextBox 4"/>
+          <p:cNvSpPr txBox="1"/>
+          <p:nvPr/>
+        </p:nvSpPr>
+        <p:spPr>
+          <a:xfrm>
+            <a:off x="8092440" y="1371600"/>
+            <a:ext cx="3611880" cy="4572000"/>
+          </a:xfrm>
+          <a:prstGeom prst="rect">
+            <a:avLst/>
+          </a:prstGeom>
+          <a:noFill/>
+        </p:spPr>
+        <p:txBody>
+          <a:bodyPr wrap="square">
+            <a:spAutoFit/>
+          </a:bodyPr>
+          <a:lstStyle/>
+          <a:p>
+            <a:pPr algn="l">
+              <a:lnSpc>
+                <a:spcPct val="160000"/>
+              </a:lnSpc>
+            </a:pPr>
+            <a:r>
+              <a:rPr sz="1250" b="0">
+                <a:solidFill>
+                  <a:srgbClr val="1A1A1A"/>
+                </a:solidFill>
+                <a:latin typeface="맑은 고딕"/>
+              </a:rPr>
+              <a:t>• [신용·체크카드] → 카드사 [비씨] 선택 → [결제하기]</a:t>
+            </a:r>
+          </a:p>
+          <a:p>
+            <a:pPr algn="l">
+              <a:lnSpc>
+                <a:spcPct val="160000"/>
+              </a:lnSpc>
+            </a:pPr>
+            <a:r>
+              <a:rPr sz="1250" b="0">
+                <a:solidFill>
+                  <a:srgbClr val="1A1A1A"/>
+                </a:solidFill>
+                <a:latin typeface="맑은 고딕"/>
+              </a:rPr>
+              <a:t>• 비씨카드 ISP/페이북 인증창이 호출됩니다.</a:t>
+            </a:r>
+          </a:p>
+          <a:p>
+            <a:pPr algn="l">
+              <a:lnSpc>
+                <a:spcPct val="160000"/>
+              </a:lnSpc>
+            </a:pPr>
+            <a:r>
+              <a:rPr sz="1250" b="0">
+                <a:solidFill>
+                  <a:srgbClr val="1A1A1A"/>
+                </a:solidFill>
+                <a:latin typeface="맑은 고딕"/>
+              </a:rPr>
+              <a:t>• 이후 카드사 인증을 완료하면 결제가 승인됩니다.</a:t>
             </a:r>
           </a:p>
         </p:txBody>
